--- a/KhmerOCRCompletepptx.pptx
+++ b/KhmerOCRCompletepptx.pptx
@@ -2989,7 +2989,7 @@
         </p:nvSpPr>
         <p:spPr>
           <a:xfrm>
-            <a:off x="793790" y="767120"/>
+            <a:off x="793790" y="667345"/>
             <a:ext cx="5387102" cy="673418"/>
           </a:xfrm>
           <a:prstGeom prst="rect">
@@ -3031,7 +3031,7 @@
         </p:nvSpPr>
         <p:spPr>
           <a:xfrm>
-            <a:off x="793790" y="1522333"/>
+            <a:off x="793790" y="1422559"/>
             <a:ext cx="5846088" cy="538758"/>
           </a:xfrm>
           <a:prstGeom prst="rect">
@@ -3073,7 +3073,7 @@
         </p:nvSpPr>
         <p:spPr>
           <a:xfrm>
-            <a:off x="793790" y="2368153"/>
+            <a:off x="793790" y="2268379"/>
             <a:ext cx="13042821" cy="336113"/>
           </a:xfrm>
           <a:prstGeom prst="rect">
@@ -3109,14 +3109,58 @@
       </p:sp>
       <p:sp>
         <p:nvSpPr>
-          <p:cNvPr id="5" name="Text 3"/>
-          <p:cNvSpPr/>
-          <p:nvPr/>
-        </p:nvSpPr>
-        <p:spPr>
-          <a:xfrm>
-            <a:off x="870466" y="3042166"/>
-            <a:ext cx="2915245" cy="711041"/>
+          <p:cNvPr id="5" name="Shape 3"/>
+          <p:cNvSpPr/>
+          <p:nvPr/>
+        </p:nvSpPr>
+        <p:spPr>
+          <a:xfrm>
+            <a:off x="793790" y="2834759"/>
+            <a:ext cx="4211122" cy="1617940"/>
+          </a:xfrm>
+          <a:prstGeom prst="roundRect">
+            <a:avLst>
+              <a:gd name="adj" fmla="val 1998"/>
+            </a:avLst>
+          </a:prstGeom>
+          <a:solidFill>
+            <a:srgbClr val="F2EEEE"/>
+          </a:solidFill>
+          <a:ln/>
+        </p:spPr>
+      </p:sp>
+      <p:sp>
+        <p:nvSpPr>
+          <p:cNvPr id="6" name="Shape 4"/>
+          <p:cNvSpPr/>
+          <p:nvPr/>
+        </p:nvSpPr>
+        <p:spPr>
+          <a:xfrm>
+            <a:off x="2576155" y="3050143"/>
+            <a:ext cx="646390" cy="646390"/>
+          </a:xfrm>
+          <a:prstGeom prst="roundRect">
+            <a:avLst>
+              <a:gd name="adj" fmla="val 14144844"/>
+            </a:avLst>
+          </a:prstGeom>
+          <a:solidFill>
+            <a:srgbClr val="2150FE"/>
+          </a:solidFill>
+          <a:ln/>
+        </p:spPr>
+      </p:sp>
+      <p:sp>
+        <p:nvSpPr>
+          <p:cNvPr id="7" name="Text 5"/>
+          <p:cNvSpPr/>
+          <p:nvPr/>
+        </p:nvSpPr>
+        <p:spPr>
+          <a:xfrm>
+            <a:off x="2753916" y="3191470"/>
+            <a:ext cx="290870" cy="363617"/>
           </a:xfrm>
           <a:prstGeom prst="rect">
             <a:avLst/>
@@ -3130,35 +3174,35 @@
           <a:p>
             <a:pPr algn="ctr" indent="0" marL="0">
               <a:lnSpc>
-                <a:spcPts val="5550"/>
-              </a:lnSpc>
-              <a:buNone/>
-            </a:pPr>
-            <a:r>
-              <a:rPr lang="en-US" sz="5550" dirty="0">
-                <a:solidFill>
-                  <a:srgbClr val="4C4C4D"/>
+                <a:spcPts val="3550"/>
+              </a:lnSpc>
+              <a:buNone/>
+            </a:pPr>
+            <a:r>
+              <a:rPr lang="en-US" sz="2250" dirty="0">
+                <a:solidFill>
+                  <a:srgbClr val="FFFFFF"/>
                 </a:solidFill>
                 <a:latin typeface="Crimson Pro Semi Bold" pitchFamily="34" charset="0"/>
                 <a:ea typeface="Crimson Pro Semi Bold" pitchFamily="34" charset="-122"/>
                 <a:cs typeface="Crimson Pro Semi Bold" pitchFamily="34" charset="-120"/>
               </a:rPr>
-              <a:t>3.00%</a:t>
-            </a:r>
-            <a:endParaRPr lang="en-US" sz="5550" dirty="0"/>
-          </a:p>
-        </p:txBody>
-      </p:sp>
-      <p:sp>
-        <p:nvSpPr>
-          <p:cNvPr id="6" name="Text 4"/>
-          <p:cNvSpPr/>
-          <p:nvPr/>
-        </p:nvSpPr>
-        <p:spPr>
-          <a:xfrm>
-            <a:off x="793790" y="4014311"/>
-            <a:ext cx="3068717" cy="336113"/>
+              <a:t>1</a:t>
+            </a:r>
+            <a:endParaRPr lang="en-US" sz="2250" dirty="0"/>
+          </a:p>
+        </p:txBody>
+      </p:sp>
+      <p:sp>
+        <p:nvSpPr>
+          <p:cNvPr id="8" name="Text 6"/>
+          <p:cNvSpPr/>
+          <p:nvPr/>
+        </p:nvSpPr>
+        <p:spPr>
+          <a:xfrm>
+            <a:off x="1009174" y="3901202"/>
+            <a:ext cx="3780353" cy="336113"/>
           </a:xfrm>
           <a:prstGeom prst="rect">
             <a:avLst/>
@@ -3193,14 +3237,58 @@
       </p:sp>
       <p:sp>
         <p:nvSpPr>
-          <p:cNvPr id="7" name="Text 5"/>
-          <p:cNvSpPr/>
-          <p:nvPr/>
-        </p:nvSpPr>
-        <p:spPr>
-          <a:xfrm>
-            <a:off x="4195048" y="3042166"/>
-            <a:ext cx="2915364" cy="711041"/>
+          <p:cNvPr id="9" name="Shape 7"/>
+          <p:cNvSpPr/>
+          <p:nvPr/>
+        </p:nvSpPr>
+        <p:spPr>
+          <a:xfrm>
+            <a:off x="5209580" y="2834759"/>
+            <a:ext cx="4211122" cy="1617940"/>
+          </a:xfrm>
+          <a:prstGeom prst="roundRect">
+            <a:avLst>
+              <a:gd name="adj" fmla="val 1998"/>
+            </a:avLst>
+          </a:prstGeom>
+          <a:solidFill>
+            <a:srgbClr val="F2EEEE"/>
+          </a:solidFill>
+          <a:ln/>
+        </p:spPr>
+      </p:sp>
+      <p:sp>
+        <p:nvSpPr>
+          <p:cNvPr id="10" name="Shape 8"/>
+          <p:cNvSpPr/>
+          <p:nvPr/>
+        </p:nvSpPr>
+        <p:spPr>
+          <a:xfrm>
+            <a:off x="6991945" y="3050143"/>
+            <a:ext cx="646390" cy="646390"/>
+          </a:xfrm>
+          <a:prstGeom prst="roundRect">
+            <a:avLst>
+              <a:gd name="adj" fmla="val 14144844"/>
+            </a:avLst>
+          </a:prstGeom>
+          <a:solidFill>
+            <a:srgbClr val="2150FE"/>
+          </a:solidFill>
+          <a:ln/>
+        </p:spPr>
+      </p:sp>
+      <p:sp>
+        <p:nvSpPr>
+          <p:cNvPr id="11" name="Text 9"/>
+          <p:cNvSpPr/>
+          <p:nvPr/>
+        </p:nvSpPr>
+        <p:spPr>
+          <a:xfrm>
+            <a:off x="7169706" y="3191470"/>
+            <a:ext cx="290870" cy="363617"/>
           </a:xfrm>
           <a:prstGeom prst="rect">
             <a:avLst/>
@@ -3214,35 +3302,35 @@
           <a:p>
             <a:pPr algn="ctr" indent="0" marL="0">
               <a:lnSpc>
-                <a:spcPts val="5550"/>
-              </a:lnSpc>
-              <a:buNone/>
-            </a:pPr>
-            <a:r>
-              <a:rPr lang="en-US" sz="5550" dirty="0">
-                <a:solidFill>
-                  <a:srgbClr val="4C4C4D"/>
+                <a:spcPts val="3550"/>
+              </a:lnSpc>
+              <a:buNone/>
+            </a:pPr>
+            <a:r>
+              <a:rPr lang="en-US" sz="2250" dirty="0">
+                <a:solidFill>
+                  <a:srgbClr val="FFFFFF"/>
                 </a:solidFill>
                 <a:latin typeface="Crimson Pro Semi Bold" pitchFamily="34" charset="0"/>
                 <a:ea typeface="Crimson Pro Semi Bold" pitchFamily="34" charset="-122"/>
                 <a:cs typeface="Crimson Pro Semi Bold" pitchFamily="34" charset="-120"/>
               </a:rPr>
-              <a:t>2.46%</a:t>
-            </a:r>
-            <a:endParaRPr lang="en-US" sz="5550" dirty="0"/>
-          </a:p>
-        </p:txBody>
-      </p:sp>
-      <p:sp>
-        <p:nvSpPr>
-          <p:cNvPr id="8" name="Text 6"/>
-          <p:cNvSpPr/>
-          <p:nvPr/>
-        </p:nvSpPr>
-        <p:spPr>
-          <a:xfrm>
-            <a:off x="4118372" y="4014311"/>
-            <a:ext cx="3068836" cy="336113"/>
+              <a:t>2</a:t>
+            </a:r>
+            <a:endParaRPr lang="en-US" sz="2250" dirty="0"/>
+          </a:p>
+        </p:txBody>
+      </p:sp>
+      <p:sp>
+        <p:nvSpPr>
+          <p:cNvPr id="12" name="Text 10"/>
+          <p:cNvSpPr/>
+          <p:nvPr/>
+        </p:nvSpPr>
+        <p:spPr>
+          <a:xfrm>
+            <a:off x="5424964" y="3901202"/>
+            <a:ext cx="3780353" cy="336113"/>
           </a:xfrm>
           <a:prstGeom prst="rect">
             <a:avLst/>
@@ -3277,14 +3365,58 @@
       </p:sp>
       <p:sp>
         <p:nvSpPr>
-          <p:cNvPr id="9" name="Text 7"/>
-          <p:cNvSpPr/>
-          <p:nvPr/>
-        </p:nvSpPr>
-        <p:spPr>
-          <a:xfrm>
-            <a:off x="7519749" y="3042166"/>
-            <a:ext cx="2915364" cy="711041"/>
+          <p:cNvPr id="13" name="Shape 11"/>
+          <p:cNvSpPr/>
+          <p:nvPr/>
+        </p:nvSpPr>
+        <p:spPr>
+          <a:xfrm>
+            <a:off x="9625370" y="2834759"/>
+            <a:ext cx="4211122" cy="1617940"/>
+          </a:xfrm>
+          <a:prstGeom prst="roundRect">
+            <a:avLst>
+              <a:gd name="adj" fmla="val 1998"/>
+            </a:avLst>
+          </a:prstGeom>
+          <a:solidFill>
+            <a:srgbClr val="F2EEEE"/>
+          </a:solidFill>
+          <a:ln/>
+        </p:spPr>
+      </p:sp>
+      <p:sp>
+        <p:nvSpPr>
+          <p:cNvPr id="14" name="Shape 12"/>
+          <p:cNvSpPr/>
+          <p:nvPr/>
+        </p:nvSpPr>
+        <p:spPr>
+          <a:xfrm>
+            <a:off x="11407735" y="3050143"/>
+            <a:ext cx="646390" cy="646390"/>
+          </a:xfrm>
+          <a:prstGeom prst="roundRect">
+            <a:avLst>
+              <a:gd name="adj" fmla="val 14144844"/>
+            </a:avLst>
+          </a:prstGeom>
+          <a:solidFill>
+            <a:srgbClr val="2150FE"/>
+          </a:solidFill>
+          <a:ln/>
+        </p:spPr>
+      </p:sp>
+      <p:sp>
+        <p:nvSpPr>
+          <p:cNvPr id="15" name="Text 13"/>
+          <p:cNvSpPr/>
+          <p:nvPr/>
+        </p:nvSpPr>
+        <p:spPr>
+          <a:xfrm>
+            <a:off x="11585496" y="3191470"/>
+            <a:ext cx="290870" cy="363617"/>
           </a:xfrm>
           <a:prstGeom prst="rect">
             <a:avLst/>
@@ -3298,35 +3430,35 @@
           <a:p>
             <a:pPr algn="ctr" indent="0" marL="0">
               <a:lnSpc>
-                <a:spcPts val="5550"/>
-              </a:lnSpc>
-              <a:buNone/>
-            </a:pPr>
-            <a:r>
-              <a:rPr lang="en-US" sz="5550" dirty="0">
-                <a:solidFill>
-                  <a:srgbClr val="4C4C4D"/>
+                <a:spcPts val="3550"/>
+              </a:lnSpc>
+              <a:buNone/>
+            </a:pPr>
+            <a:r>
+              <a:rPr lang="en-US" sz="2250" dirty="0">
+                <a:solidFill>
+                  <a:srgbClr val="FFFFFF"/>
                 </a:solidFill>
                 <a:latin typeface="Crimson Pro Semi Bold" pitchFamily="34" charset="0"/>
                 <a:ea typeface="Crimson Pro Semi Bold" pitchFamily="34" charset="-122"/>
                 <a:cs typeface="Crimson Pro Semi Bold" pitchFamily="34" charset="-120"/>
               </a:rPr>
-              <a:t>2.8M</a:t>
-            </a:r>
-            <a:endParaRPr lang="en-US" sz="5550" dirty="0"/>
-          </a:p>
-        </p:txBody>
-      </p:sp>
-      <p:sp>
-        <p:nvSpPr>
-          <p:cNvPr id="10" name="Text 8"/>
-          <p:cNvSpPr/>
-          <p:nvPr/>
-        </p:nvSpPr>
-        <p:spPr>
-          <a:xfrm>
-            <a:off x="7443073" y="4014311"/>
-            <a:ext cx="3068836" cy="336113"/>
+              <a:t>3</a:t>
+            </a:r>
+            <a:endParaRPr lang="en-US" sz="2250" dirty="0"/>
+          </a:p>
+        </p:txBody>
+      </p:sp>
+      <p:sp>
+        <p:nvSpPr>
+          <p:cNvPr id="16" name="Text 14"/>
+          <p:cNvSpPr/>
+          <p:nvPr/>
+        </p:nvSpPr>
+        <p:spPr>
+          <a:xfrm>
+            <a:off x="9840754" y="3901202"/>
+            <a:ext cx="3780353" cy="336113"/>
           </a:xfrm>
           <a:prstGeom prst="rect">
             <a:avLst/>
@@ -3361,14 +3493,58 @@
       </p:sp>
       <p:sp>
         <p:nvSpPr>
-          <p:cNvPr id="11" name="Text 9"/>
-          <p:cNvSpPr/>
-          <p:nvPr/>
-        </p:nvSpPr>
-        <p:spPr>
-          <a:xfrm>
-            <a:off x="10844451" y="3042166"/>
-            <a:ext cx="2915364" cy="711041"/>
+          <p:cNvPr id="17" name="Shape 15"/>
+          <p:cNvSpPr/>
+          <p:nvPr/>
+        </p:nvSpPr>
+        <p:spPr>
+          <a:xfrm>
+            <a:off x="793790" y="4657368"/>
+            <a:ext cx="6419017" cy="1617940"/>
+          </a:xfrm>
+          <a:prstGeom prst="roundRect">
+            <a:avLst>
+              <a:gd name="adj" fmla="val 1998"/>
+            </a:avLst>
+          </a:prstGeom>
+          <a:solidFill>
+            <a:srgbClr val="F2EEEE"/>
+          </a:solidFill>
+          <a:ln/>
+        </p:spPr>
+      </p:sp>
+      <p:sp>
+        <p:nvSpPr>
+          <p:cNvPr id="18" name="Shape 16"/>
+          <p:cNvSpPr/>
+          <p:nvPr/>
+        </p:nvSpPr>
+        <p:spPr>
+          <a:xfrm>
+            <a:off x="3680103" y="4872752"/>
+            <a:ext cx="646390" cy="646390"/>
+          </a:xfrm>
+          <a:prstGeom prst="roundRect">
+            <a:avLst>
+              <a:gd name="adj" fmla="val 14144844"/>
+            </a:avLst>
+          </a:prstGeom>
+          <a:solidFill>
+            <a:srgbClr val="2150FE"/>
+          </a:solidFill>
+          <a:ln/>
+        </p:spPr>
+      </p:sp>
+      <p:sp>
+        <p:nvSpPr>
+          <p:cNvPr id="19" name="Text 17"/>
+          <p:cNvSpPr/>
+          <p:nvPr/>
+        </p:nvSpPr>
+        <p:spPr>
+          <a:xfrm>
+            <a:off x="3857863" y="5014079"/>
+            <a:ext cx="290870" cy="363617"/>
           </a:xfrm>
           <a:prstGeom prst="rect">
             <a:avLst/>
@@ -3382,35 +3558,35 @@
           <a:p>
             <a:pPr algn="ctr" indent="0" marL="0">
               <a:lnSpc>
-                <a:spcPts val="5550"/>
-              </a:lnSpc>
-              <a:buNone/>
-            </a:pPr>
-            <a:r>
-              <a:rPr lang="en-US" sz="5550" dirty="0">
-                <a:solidFill>
-                  <a:srgbClr val="4C4C4D"/>
+                <a:spcPts val="3550"/>
+              </a:lnSpc>
+              <a:buNone/>
+            </a:pPr>
+            <a:r>
+              <a:rPr lang="en-US" sz="2250" dirty="0">
+                <a:solidFill>
+                  <a:srgbClr val="FFFFFF"/>
                 </a:solidFill>
                 <a:latin typeface="Crimson Pro Semi Bold" pitchFamily="34" charset="0"/>
                 <a:ea typeface="Crimson Pro Semi Bold" pitchFamily="34" charset="-122"/>
                 <a:cs typeface="Crimson Pro Semi Bold" pitchFamily="34" charset="-120"/>
               </a:rPr>
-              <a:t>9×</a:t>
-            </a:r>
-            <a:endParaRPr lang="en-US" sz="5550" dirty="0"/>
-          </a:p>
-        </p:txBody>
-      </p:sp>
-      <p:sp>
-        <p:nvSpPr>
-          <p:cNvPr id="12" name="Text 10"/>
-          <p:cNvSpPr/>
-          <p:nvPr/>
-        </p:nvSpPr>
-        <p:spPr>
-          <a:xfrm>
-            <a:off x="10767774" y="4014311"/>
-            <a:ext cx="3068836" cy="336113"/>
+              <a:t>4</a:t>
+            </a:r>
+            <a:endParaRPr lang="en-US" sz="2250" dirty="0"/>
+          </a:p>
+        </p:txBody>
+      </p:sp>
+      <p:sp>
+        <p:nvSpPr>
+          <p:cNvPr id="20" name="Text 18"/>
+          <p:cNvSpPr/>
+          <p:nvPr/>
+        </p:nvSpPr>
+        <p:spPr>
+          <a:xfrm>
+            <a:off x="1009174" y="5723811"/>
+            <a:ext cx="5988248" cy="336113"/>
           </a:xfrm>
           <a:prstGeom prst="rect">
             <a:avLst/>
@@ -3445,14 +3621,58 @@
       </p:sp>
       <p:sp>
         <p:nvSpPr>
-          <p:cNvPr id="13" name="Text 11"/>
-          <p:cNvSpPr/>
-          <p:nvPr/>
-        </p:nvSpPr>
-        <p:spPr>
-          <a:xfrm>
-            <a:off x="5857399" y="4867394"/>
-            <a:ext cx="2915364" cy="711041"/>
+          <p:cNvPr id="21" name="Shape 19"/>
+          <p:cNvSpPr/>
+          <p:nvPr/>
+        </p:nvSpPr>
+        <p:spPr>
+          <a:xfrm>
+            <a:off x="7417475" y="4657368"/>
+            <a:ext cx="6419017" cy="1617940"/>
+          </a:xfrm>
+          <a:prstGeom prst="roundRect">
+            <a:avLst>
+              <a:gd name="adj" fmla="val 1998"/>
+            </a:avLst>
+          </a:prstGeom>
+          <a:solidFill>
+            <a:srgbClr val="F2EEEE"/>
+          </a:solidFill>
+          <a:ln/>
+        </p:spPr>
+      </p:sp>
+      <p:sp>
+        <p:nvSpPr>
+          <p:cNvPr id="22" name="Shape 20"/>
+          <p:cNvSpPr/>
+          <p:nvPr/>
+        </p:nvSpPr>
+        <p:spPr>
+          <a:xfrm>
+            <a:off x="10303788" y="4872752"/>
+            <a:ext cx="646390" cy="646390"/>
+          </a:xfrm>
+          <a:prstGeom prst="roundRect">
+            <a:avLst>
+              <a:gd name="adj" fmla="val 14144844"/>
+            </a:avLst>
+          </a:prstGeom>
+          <a:solidFill>
+            <a:srgbClr val="2150FE"/>
+          </a:solidFill>
+          <a:ln/>
+        </p:spPr>
+      </p:sp>
+      <p:sp>
+        <p:nvSpPr>
+          <p:cNvPr id="23" name="Text 21"/>
+          <p:cNvSpPr/>
+          <p:nvPr/>
+        </p:nvSpPr>
+        <p:spPr>
+          <a:xfrm>
+            <a:off x="10481548" y="5014079"/>
+            <a:ext cx="290870" cy="363617"/>
           </a:xfrm>
           <a:prstGeom prst="rect">
             <a:avLst/>
@@ -3466,14 +3686,14 @@
           <a:p>
             <a:pPr algn="ctr" indent="0" marL="0">
               <a:lnSpc>
-                <a:spcPts val="5550"/>
-              </a:lnSpc>
-              <a:buNone/>
-            </a:pPr>
-            <a:r>
-              <a:rPr lang="en-US" sz="5550" dirty="0">
-                <a:solidFill>
-                  <a:srgbClr val="4C4C4D"/>
+                <a:spcPts val="3550"/>
+              </a:lnSpc>
+              <a:buNone/>
+            </a:pPr>
+            <a:r>
+              <a:rPr lang="en-US" sz="2250" dirty="0">
+                <a:solidFill>
+                  <a:srgbClr val="FFFFFF"/>
                 </a:solidFill>
                 <a:latin typeface="Crimson Pro Semi Bold" pitchFamily="34" charset="0"/>
                 <a:ea typeface="Crimson Pro Semi Bold" pitchFamily="34" charset="-122"/>
@@ -3481,20 +3701,20 @@
               </a:rPr>
               <a:t>5</a:t>
             </a:r>
-            <a:endParaRPr lang="en-US" sz="5550" dirty="0"/>
-          </a:p>
-        </p:txBody>
-      </p:sp>
-      <p:sp>
-        <p:nvSpPr>
-          <p:cNvPr id="14" name="Text 12"/>
-          <p:cNvSpPr/>
-          <p:nvPr/>
-        </p:nvSpPr>
-        <p:spPr>
-          <a:xfrm>
-            <a:off x="5780723" y="5839539"/>
-            <a:ext cx="3068836" cy="336113"/>
+            <a:endParaRPr lang="en-US" sz="2250" dirty="0"/>
+          </a:p>
+        </p:txBody>
+      </p:sp>
+      <p:sp>
+        <p:nvSpPr>
+          <p:cNvPr id="24" name="Text 22"/>
+          <p:cNvSpPr/>
+          <p:nvPr/>
+        </p:nvSpPr>
+        <p:spPr>
+          <a:xfrm>
+            <a:off x="7632859" y="5723811"/>
+            <a:ext cx="5988248" cy="336113"/>
           </a:xfrm>
           <a:prstGeom prst="rect">
             <a:avLst/>
@@ -3529,13 +3749,13 @@
       </p:sp>
       <p:sp>
         <p:nvSpPr>
-          <p:cNvPr id="15" name="Shape 13"/>
-          <p:cNvSpPr/>
-          <p:nvPr/>
-        </p:nvSpPr>
-        <p:spPr>
-          <a:xfrm>
-            <a:off x="793790" y="6405920"/>
+          <p:cNvPr id="25" name="Shape 23"/>
+          <p:cNvSpPr/>
+          <p:nvPr/>
+        </p:nvSpPr>
+        <p:spPr>
+          <a:xfrm>
+            <a:off x="793790" y="6505575"/>
             <a:ext cx="2025729" cy="413147"/>
           </a:xfrm>
           <a:prstGeom prst="roundRect">
@@ -3554,13 +3774,13 @@
       </p:sp>
       <p:sp>
         <p:nvSpPr>
-          <p:cNvPr id="16" name="Text 14"/>
-          <p:cNvSpPr/>
-          <p:nvPr/>
-        </p:nvSpPr>
-        <p:spPr>
-          <a:xfrm>
-            <a:off x="930592" y="6478072"/>
+          <p:cNvPr id="26" name="Text 24"/>
+          <p:cNvSpPr/>
+          <p:nvPr/>
+        </p:nvSpPr>
+        <p:spPr>
+          <a:xfrm>
+            <a:off x="930592" y="6577727"/>
             <a:ext cx="1752124" cy="268843"/>
           </a:xfrm>
           <a:prstGeom prst="rect">
@@ -3596,13 +3816,13 @@
       </p:sp>
       <p:sp>
         <p:nvSpPr>
-          <p:cNvPr id="17" name="Shape 15"/>
-          <p:cNvSpPr/>
-          <p:nvPr/>
-        </p:nvSpPr>
-        <p:spPr>
-          <a:xfrm>
-            <a:off x="2927152" y="6405920"/>
+          <p:cNvPr id="27" name="Shape 25"/>
+          <p:cNvSpPr/>
+          <p:nvPr/>
+        </p:nvSpPr>
+        <p:spPr>
+          <a:xfrm>
+            <a:off x="2927152" y="6505575"/>
             <a:ext cx="1123831" cy="413147"/>
           </a:xfrm>
           <a:prstGeom prst="roundRect">
@@ -3621,13 +3841,13 @@
       </p:sp>
       <p:sp>
         <p:nvSpPr>
-          <p:cNvPr id="18" name="Text 16"/>
-          <p:cNvSpPr/>
-          <p:nvPr/>
-        </p:nvSpPr>
-        <p:spPr>
-          <a:xfrm>
-            <a:off x="3063954" y="6478072"/>
+          <p:cNvPr id="28" name="Text 26"/>
+          <p:cNvSpPr/>
+          <p:nvPr/>
+        </p:nvSpPr>
+        <p:spPr>
+          <a:xfrm>
+            <a:off x="3063954" y="6577727"/>
             <a:ext cx="850225" cy="268843"/>
           </a:xfrm>
           <a:prstGeom prst="rect">
@@ -3663,13 +3883,13 @@
       </p:sp>
       <p:sp>
         <p:nvSpPr>
-          <p:cNvPr id="19" name="Shape 17"/>
-          <p:cNvSpPr/>
-          <p:nvPr/>
-        </p:nvSpPr>
-        <p:spPr>
-          <a:xfrm>
-            <a:off x="4158615" y="6405920"/>
+          <p:cNvPr id="29" name="Shape 27"/>
+          <p:cNvSpPr/>
+          <p:nvPr/>
+        </p:nvSpPr>
+        <p:spPr>
+          <a:xfrm>
+            <a:off x="4158615" y="6505575"/>
             <a:ext cx="1757124" cy="413147"/>
           </a:xfrm>
           <a:prstGeom prst="roundRect">
@@ -3688,13 +3908,13 @@
       </p:sp>
       <p:sp>
         <p:nvSpPr>
-          <p:cNvPr id="20" name="Text 18"/>
-          <p:cNvSpPr/>
-          <p:nvPr/>
-        </p:nvSpPr>
-        <p:spPr>
-          <a:xfrm>
-            <a:off x="4295418" y="6478072"/>
+          <p:cNvPr id="30" name="Text 28"/>
+          <p:cNvSpPr/>
+          <p:nvPr/>
+        </p:nvSpPr>
+        <p:spPr>
+          <a:xfrm>
+            <a:off x="4295418" y="6577727"/>
             <a:ext cx="1483519" cy="268843"/>
           </a:xfrm>
           <a:prstGeom prst="rect">
@@ -3730,13 +3950,13 @@
       </p:sp>
       <p:sp>
         <p:nvSpPr>
-          <p:cNvPr id="21" name="Shape 19"/>
-          <p:cNvSpPr/>
-          <p:nvPr/>
-        </p:nvSpPr>
-        <p:spPr>
-          <a:xfrm>
-            <a:off x="6023372" y="6405920"/>
+          <p:cNvPr id="31" name="Shape 29"/>
+          <p:cNvSpPr/>
+          <p:nvPr/>
+        </p:nvSpPr>
+        <p:spPr>
+          <a:xfrm>
+            <a:off x="6023372" y="6505575"/>
             <a:ext cx="1942267" cy="413147"/>
           </a:xfrm>
           <a:prstGeom prst="roundRect">
@@ -3755,13 +3975,13 @@
       </p:sp>
       <p:sp>
         <p:nvSpPr>
-          <p:cNvPr id="22" name="Text 20"/>
-          <p:cNvSpPr/>
-          <p:nvPr/>
-        </p:nvSpPr>
-        <p:spPr>
-          <a:xfrm>
-            <a:off x="6160175" y="6478072"/>
+          <p:cNvPr id="32" name="Text 30"/>
+          <p:cNvSpPr/>
+          <p:nvPr/>
+        </p:nvSpPr>
+        <p:spPr>
+          <a:xfrm>
+            <a:off x="6160175" y="6577727"/>
             <a:ext cx="1668661" cy="268843"/>
           </a:xfrm>
           <a:prstGeom prst="rect">
@@ -3797,13 +4017,13 @@
       </p:sp>
       <p:sp>
         <p:nvSpPr>
-          <p:cNvPr id="23" name="Shape 21"/>
-          <p:cNvSpPr/>
-          <p:nvPr/>
-        </p:nvSpPr>
-        <p:spPr>
-          <a:xfrm>
-            <a:off x="8073271" y="6405920"/>
+          <p:cNvPr id="33" name="Shape 31"/>
+          <p:cNvSpPr/>
+          <p:nvPr/>
+        </p:nvSpPr>
+        <p:spPr>
+          <a:xfrm>
+            <a:off x="8073271" y="6505575"/>
             <a:ext cx="1706642" cy="413147"/>
           </a:xfrm>
           <a:prstGeom prst="roundRect">
@@ -3822,13 +4042,13 @@
       </p:sp>
       <p:sp>
         <p:nvSpPr>
-          <p:cNvPr id="24" name="Text 22"/>
-          <p:cNvSpPr/>
-          <p:nvPr/>
-        </p:nvSpPr>
-        <p:spPr>
-          <a:xfrm>
-            <a:off x="8210074" y="6478072"/>
+          <p:cNvPr id="34" name="Text 32"/>
+          <p:cNvSpPr/>
+          <p:nvPr/>
+        </p:nvSpPr>
+        <p:spPr>
+          <a:xfrm>
+            <a:off x="8210074" y="6577727"/>
             <a:ext cx="1433036" cy="268843"/>
           </a:xfrm>
           <a:prstGeom prst="rect">
@@ -3864,13 +4084,13 @@
       </p:sp>
       <p:sp>
         <p:nvSpPr>
-          <p:cNvPr id="25" name="Shape 23"/>
-          <p:cNvSpPr/>
-          <p:nvPr/>
-        </p:nvSpPr>
-        <p:spPr>
-          <a:xfrm>
-            <a:off x="793790" y="7049333"/>
+          <p:cNvPr id="35" name="Shape 33"/>
+          <p:cNvSpPr/>
+          <p:nvPr/>
+        </p:nvSpPr>
+        <p:spPr>
+          <a:xfrm>
+            <a:off x="793790" y="7148989"/>
             <a:ext cx="2631162" cy="413147"/>
           </a:xfrm>
           <a:prstGeom prst="roundRect">
@@ -3889,13 +4109,13 @@
       </p:sp>
       <p:sp>
         <p:nvSpPr>
-          <p:cNvPr id="26" name="Text 24"/>
-          <p:cNvSpPr/>
-          <p:nvPr/>
-        </p:nvSpPr>
-        <p:spPr>
-          <a:xfrm>
-            <a:off x="930592" y="7121485"/>
+          <p:cNvPr id="36" name="Text 34"/>
+          <p:cNvSpPr/>
+          <p:nvPr/>
+        </p:nvSpPr>
+        <p:spPr>
+          <a:xfrm>
+            <a:off x="930592" y="7221141"/>
             <a:ext cx="2357557" cy="268843"/>
           </a:xfrm>
           <a:prstGeom prst="rect">
@@ -13385,27 +13605,27 @@
         </p:nvSpPr>
         <p:spPr>
           <a:xfrm>
-            <a:off x="666631" y="750927"/>
-            <a:ext cx="4776907" cy="309563"/>
-          </a:xfrm>
-          <a:prstGeom prst="rect">
-            <a:avLst/>
-          </a:prstGeom>
-          <a:noFill/>
-          <a:ln/>
-        </p:spPr>
-        <p:txBody>
-          <a:bodyPr wrap="none" lIns="0" tIns="0" rIns="0" bIns="0" rtlCol="0" anchor="t"/>
-          <a:lstStyle/>
-          <a:p>
-            <a:pPr algn="l" indent="0" marL="0">
-              <a:lnSpc>
-                <a:spcPts val="2400"/>
-              </a:lnSpc>
-              <a:buNone/>
-            </a:pPr>
-            <a:r>
-              <a:rPr lang="en-US" sz="1900" b="1" dirty="0">
+            <a:off x="738426" y="769501"/>
+            <a:ext cx="5291495" cy="342900"/>
+          </a:xfrm>
+          <a:prstGeom prst="rect">
+            <a:avLst/>
+          </a:prstGeom>
+          <a:noFill/>
+          <a:ln/>
+        </p:spPr>
+        <p:txBody>
+          <a:bodyPr wrap="none" lIns="0" tIns="0" rIns="0" bIns="0" rtlCol="0" anchor="t"/>
+          <a:lstStyle/>
+          <a:p>
+            <a:pPr algn="l" indent="0" marL="0">
+              <a:lnSpc>
+                <a:spcPts val="2650"/>
+              </a:lnSpc>
+              <a:buNone/>
+            </a:pPr>
+            <a:r>
+              <a:rPr lang="en-US" sz="2150" b="1" dirty="0">
                 <a:solidFill>
                   <a:srgbClr val="152D47"/>
                 </a:solidFill>
@@ -13415,7 +13635,7 @@
               </a:rPr>
               <a:t>Diagram 4 — Model Architecture (Stages 3–5)</a:t>
             </a:r>
-            <a:endParaRPr lang="en-US" sz="1900" dirty="0"/>
+            <a:endParaRPr lang="en-US" sz="2150" dirty="0"/>
           </a:p>
         </p:txBody>
       </p:sp>
@@ -13427,27 +13647,27 @@
         </p:nvSpPr>
         <p:spPr>
           <a:xfrm>
-            <a:off x="666631" y="1195626"/>
-            <a:ext cx="13297138" cy="153114"/>
-          </a:xfrm>
-          <a:prstGeom prst="rect">
-            <a:avLst/>
-          </a:prstGeom>
-          <a:noFill/>
-          <a:ln/>
-        </p:spPr>
-        <p:txBody>
-          <a:bodyPr wrap="none" lIns="0" tIns="0" rIns="0" bIns="0" rtlCol="0" anchor="t"/>
-          <a:lstStyle/>
-          <a:p>
-            <a:pPr algn="l" indent="0" marL="0">
-              <a:lnSpc>
-                <a:spcPts val="1200"/>
-              </a:lnSpc>
-              <a:buNone/>
-            </a:pPr>
-            <a:r>
-              <a:rPr lang="en-US" sz="950" dirty="0">
+            <a:off x="738426" y="1278255"/>
+            <a:ext cx="13153549" cy="175974"/>
+          </a:xfrm>
+          <a:prstGeom prst="rect">
+            <a:avLst/>
+          </a:prstGeom>
+          <a:noFill/>
+          <a:ln/>
+        </p:spPr>
+        <p:txBody>
+          <a:bodyPr wrap="none" lIns="0" tIns="0" rIns="0" bIns="0" rtlCol="0" anchor="t"/>
+          <a:lstStyle/>
+          <a:p>
+            <a:pPr algn="l" indent="0" marL="0">
+              <a:lnSpc>
+                <a:spcPts val="1350"/>
+              </a:lnSpc>
+              <a:buNone/>
+            </a:pPr>
+            <a:r>
+              <a:rPr lang="en-US" sz="1050" dirty="0">
                 <a:solidFill>
                   <a:srgbClr val="4C4C4D"/>
                 </a:solidFill>
@@ -13457,7 +13677,7 @@
               </a:rPr>
               <a:t>Transformer Encoder → Decoder auto-regressive generation → Unicode text output</a:t>
             </a:r>
-            <a:endParaRPr lang="en-US" sz="950" dirty="0"/>
+            <a:endParaRPr lang="en-US" sz="1050" dirty="0"/>
           </a:p>
         </p:txBody>
       </p:sp>
@@ -13469,12 +13689,12 @@
         </p:nvSpPr>
         <p:spPr>
           <a:xfrm>
-            <a:off x="666631" y="1424702"/>
-            <a:ext cx="13297138" cy="1215271"/>
+            <a:off x="738426" y="1547455"/>
+            <a:ext cx="13153549" cy="1390888"/>
           </a:xfrm>
           <a:prstGeom prst="roundRect">
             <a:avLst>
-              <a:gd name="adj" fmla="val 1528"/>
+              <a:gd name="adj" fmla="val 1479"/>
             </a:avLst>
           </a:prstGeom>
           <a:solidFill>
@@ -13491,27 +13711,27 @@
         </p:nvSpPr>
         <p:spPr>
           <a:xfrm>
-            <a:off x="790337" y="1548408"/>
-            <a:ext cx="2755463" cy="193477"/>
-          </a:xfrm>
-          <a:prstGeom prst="rect">
-            <a:avLst/>
-          </a:prstGeom>
-          <a:noFill/>
-          <a:ln/>
-        </p:spPr>
-        <p:txBody>
-          <a:bodyPr wrap="none" lIns="0" tIns="0" rIns="0" bIns="0" rtlCol="0" anchor="t"/>
-          <a:lstStyle/>
-          <a:p>
-            <a:pPr algn="l" indent="0" marL="0">
-              <a:lnSpc>
-                <a:spcPts val="1500"/>
-              </a:lnSpc>
-              <a:buNone/>
-            </a:pPr>
-            <a:r>
-              <a:rPr lang="en-US" sz="1200" dirty="0">
+            <a:off x="875467" y="1684496"/>
+            <a:ext cx="3052405" cy="214312"/>
+          </a:xfrm>
+          <a:prstGeom prst="rect">
+            <a:avLst/>
+          </a:prstGeom>
+          <a:noFill/>
+          <a:ln/>
+        </p:spPr>
+        <p:txBody>
+          <a:bodyPr wrap="none" lIns="0" tIns="0" rIns="0" bIns="0" rtlCol="0" anchor="t"/>
+          <a:lstStyle/>
+          <a:p>
+            <a:pPr algn="l" indent="0" marL="0">
+              <a:lnSpc>
+                <a:spcPts val="1650"/>
+              </a:lnSpc>
+              <a:buNone/>
+            </a:pPr>
+            <a:r>
+              <a:rPr lang="en-US" sz="1300" dirty="0">
                 <a:solidFill>
                   <a:srgbClr val="4C4C4D"/>
                 </a:solidFill>
@@ -13521,7 +13741,7 @@
               </a:rPr>
               <a:t>Stage 3 — Transformer Encoder (12 Layers)</a:t>
             </a:r>
-            <a:endParaRPr lang="en-US" sz="1200" dirty="0"/>
+            <a:endParaRPr lang="en-US" sz="1300" dirty="0"/>
           </a:p>
         </p:txBody>
       </p:sp>
@@ -13533,27 +13753,27 @@
         </p:nvSpPr>
         <p:spPr>
           <a:xfrm>
-            <a:off x="790337" y="1782366"/>
-            <a:ext cx="13049726" cy="153114"/>
-          </a:xfrm>
-          <a:prstGeom prst="rect">
-            <a:avLst/>
-          </a:prstGeom>
-          <a:noFill/>
-          <a:ln/>
-        </p:spPr>
-        <p:txBody>
-          <a:bodyPr wrap="none" lIns="0" tIns="0" rIns="0" bIns="0" rtlCol="0" anchor="t"/>
-          <a:lstStyle/>
-          <a:p>
-            <a:pPr algn="l" indent="0" marL="0">
-              <a:lnSpc>
-                <a:spcPts val="1200"/>
-              </a:lnSpc>
-              <a:buNone/>
-            </a:pPr>
-            <a:r>
-              <a:rPr lang="en-US" sz="950" dirty="0">
+            <a:off x="875467" y="1948458"/>
+            <a:ext cx="12879467" cy="175974"/>
+          </a:xfrm>
+          <a:prstGeom prst="rect">
+            <a:avLst/>
+          </a:prstGeom>
+          <a:noFill/>
+          <a:ln/>
+        </p:spPr>
+        <p:txBody>
+          <a:bodyPr wrap="none" lIns="0" tIns="0" rIns="0" bIns="0" rtlCol="0" anchor="t"/>
+          <a:lstStyle/>
+          <a:p>
+            <a:pPr algn="l" indent="0" marL="0">
+              <a:lnSpc>
+                <a:spcPts val="1350"/>
+              </a:lnSpc>
+              <a:buNone/>
+            </a:pPr>
+            <a:r>
+              <a:rPr lang="en-US" sz="1050" dirty="0">
                 <a:solidFill>
                   <a:srgbClr val="4C4C4D"/>
                 </a:solidFill>
@@ -13563,7 +13783,7 @@
               </a:rPr>
               <a:t>Processes all 64 patches simultaneously with self-attention — each patch communicates with every other.</a:t>
             </a:r>
-            <a:endParaRPr lang="en-US" sz="950" dirty="0"/>
+            <a:endParaRPr lang="en-US" sz="1050" dirty="0"/>
           </a:p>
         </p:txBody>
       </p:sp>
@@ -13575,27 +13795,27 @@
         </p:nvSpPr>
         <p:spPr>
           <a:xfrm>
-            <a:off x="790337" y="1975961"/>
-            <a:ext cx="13049726" cy="153114"/>
-          </a:xfrm>
-          <a:prstGeom prst="rect">
-            <a:avLst/>
-          </a:prstGeom>
-          <a:noFill/>
-          <a:ln/>
-        </p:spPr>
-        <p:txBody>
-          <a:bodyPr wrap="none" lIns="0" tIns="0" rIns="0" bIns="0" rtlCol="0" anchor="t"/>
-          <a:lstStyle/>
-          <a:p>
-            <a:pPr algn="l" indent="0" marL="0">
-              <a:lnSpc>
-                <a:spcPts val="1200"/>
-              </a:lnSpc>
-              <a:buNone/>
-            </a:pPr>
-            <a:r>
-              <a:rPr lang="en-US" sz="950" dirty="0">
+            <a:off x="875467" y="2174081"/>
+            <a:ext cx="12879467" cy="175974"/>
+          </a:xfrm>
+          <a:prstGeom prst="rect">
+            <a:avLst/>
+          </a:prstGeom>
+          <a:noFill/>
+          <a:ln/>
+        </p:spPr>
+        <p:txBody>
+          <a:bodyPr wrap="none" lIns="0" tIns="0" rIns="0" bIns="0" rtlCol="0" anchor="t"/>
+          <a:lstStyle/>
+          <a:p>
+            <a:pPr algn="l" indent="0" marL="0">
+              <a:lnSpc>
+                <a:spcPts val="1350"/>
+              </a:lnSpc>
+              <a:buNone/>
+            </a:pPr>
+            <a:r>
+              <a:rPr lang="en-US" sz="1050" dirty="0">
                 <a:solidFill>
                   <a:srgbClr val="4C4C4D"/>
                 </a:solidFill>
@@ -13605,7 +13825,7 @@
               </a:rPr>
               <a:t>Architecture: 12 layers · 8 attention heads · Model dim 512 · Feed-forward dim 2048 · Dropout 0.1</a:t>
             </a:r>
-            <a:endParaRPr lang="en-US" sz="950" dirty="0"/>
+            <a:endParaRPr lang="en-US" sz="1050" dirty="0"/>
           </a:p>
         </p:txBody>
       </p:sp>
@@ -13617,27 +13837,27 @@
         </p:nvSpPr>
         <p:spPr>
           <a:xfrm>
-            <a:off x="790337" y="2169557"/>
-            <a:ext cx="13049726" cy="153114"/>
-          </a:xfrm>
-          <a:prstGeom prst="rect">
-            <a:avLst/>
-          </a:prstGeom>
-          <a:noFill/>
-          <a:ln/>
-        </p:spPr>
-        <p:txBody>
-          <a:bodyPr wrap="none" lIns="0" tIns="0" rIns="0" bIns="0" rtlCol="0" anchor="t"/>
-          <a:lstStyle/>
-          <a:p>
-            <a:pPr algn="l" indent="0" marL="0">
-              <a:lnSpc>
-                <a:spcPts val="1200"/>
-              </a:lnSpc>
-              <a:buNone/>
-            </a:pPr>
-            <a:r>
-              <a:rPr lang="en-US" sz="950" dirty="0">
+            <a:off x="875467" y="2399705"/>
+            <a:ext cx="12879467" cy="175974"/>
+          </a:xfrm>
+          <a:prstGeom prst="rect">
+            <a:avLst/>
+          </a:prstGeom>
+          <a:noFill/>
+          <a:ln/>
+        </p:spPr>
+        <p:txBody>
+          <a:bodyPr wrap="none" lIns="0" tIns="0" rIns="0" bIns="0" rtlCol="0" anchor="t"/>
+          <a:lstStyle/>
+          <a:p>
+            <a:pPr algn="l" indent="0" marL="0">
+              <a:lnSpc>
+                <a:spcPts val="1350"/>
+              </a:lnSpc>
+              <a:buNone/>
+            </a:pPr>
+            <a:r>
+              <a:rPr lang="en-US" sz="1050" dirty="0">
                 <a:solidFill>
                   <a:srgbClr val="4C4C4D"/>
                 </a:solidFill>
@@ -13647,7 +13867,7 @@
               </a:rPr>
               <a:t>Each layer: Multi-Head Self-Attention → Feed-Forward Network → Layer Norm + Residual Connection</a:t>
             </a:r>
-            <a:endParaRPr lang="en-US" sz="950" dirty="0"/>
+            <a:endParaRPr lang="en-US" sz="1050" dirty="0"/>
           </a:p>
         </p:txBody>
       </p:sp>
@@ -13659,27 +13879,27 @@
         </p:nvSpPr>
         <p:spPr>
           <a:xfrm>
-            <a:off x="790337" y="2363153"/>
-            <a:ext cx="13049726" cy="153114"/>
-          </a:xfrm>
-          <a:prstGeom prst="rect">
-            <a:avLst/>
-          </a:prstGeom>
-          <a:noFill/>
-          <a:ln/>
-        </p:spPr>
-        <p:txBody>
-          <a:bodyPr wrap="none" lIns="0" tIns="0" rIns="0" bIns="0" rtlCol="0" anchor="t"/>
-          <a:lstStyle/>
-          <a:p>
-            <a:pPr algn="l" indent="0" marL="0">
-              <a:lnSpc>
-                <a:spcPts val="1200"/>
-              </a:lnSpc>
-              <a:buNone/>
-            </a:pPr>
-            <a:r>
-              <a:rPr lang="en-US" sz="950" dirty="0">
+            <a:off x="875467" y="2625328"/>
+            <a:ext cx="12879467" cy="175974"/>
+          </a:xfrm>
+          <a:prstGeom prst="rect">
+            <a:avLst/>
+          </a:prstGeom>
+          <a:noFill/>
+          <a:ln/>
+        </p:spPr>
+        <p:txBody>
+          <a:bodyPr wrap="none" lIns="0" tIns="0" rIns="0" bIns="0" rtlCol="0" anchor="t"/>
+          <a:lstStyle/>
+          <a:p>
+            <a:pPr algn="l" indent="0" marL="0">
+              <a:lnSpc>
+                <a:spcPts val="1350"/>
+              </a:lnSpc>
+              <a:buNone/>
+            </a:pPr>
+            <a:r>
+              <a:rPr lang="en-US" sz="1050" dirty="0">
                 <a:solidFill>
                   <a:srgbClr val="4C4C4D"/>
                 </a:solidFill>
@@ -13689,7 +13909,7 @@
               </a:rPr>
               <a:t>Output: 64 enriched patch vectors × 512-dim</a:t>
             </a:r>
-            <a:endParaRPr lang="en-US" sz="950" dirty="0"/>
+            <a:endParaRPr lang="en-US" sz="1050" dirty="0"/>
           </a:p>
         </p:txBody>
       </p:sp>
@@ -13701,27 +13921,27 @@
         </p:nvSpPr>
         <p:spPr>
           <a:xfrm>
-            <a:off x="666631" y="2741295"/>
-            <a:ext cx="3191589" cy="193477"/>
-          </a:xfrm>
-          <a:prstGeom prst="rect">
-            <a:avLst/>
-          </a:prstGeom>
-          <a:noFill/>
-          <a:ln/>
-        </p:spPr>
-        <p:txBody>
-          <a:bodyPr wrap="none" lIns="0" tIns="0" rIns="0" bIns="0" rtlCol="0" anchor="t"/>
-          <a:lstStyle/>
-          <a:p>
-            <a:pPr algn="l" indent="0" marL="0">
-              <a:lnSpc>
-                <a:spcPts val="1500"/>
-              </a:lnSpc>
-              <a:buNone/>
-            </a:pPr>
-            <a:r>
-              <a:rPr lang="en-US" sz="1200" dirty="0">
+            <a:off x="738426" y="3062645"/>
+            <a:ext cx="3535561" cy="214312"/>
+          </a:xfrm>
+          <a:prstGeom prst="rect">
+            <a:avLst/>
+          </a:prstGeom>
+          <a:noFill/>
+          <a:ln/>
+        </p:spPr>
+        <p:txBody>
+          <a:bodyPr wrap="none" lIns="0" tIns="0" rIns="0" bIns="0" rtlCol="0" anchor="t"/>
+          <a:lstStyle/>
+          <a:p>
+            <a:pPr algn="l" indent="0" marL="0">
+              <a:lnSpc>
+                <a:spcPts val="1650"/>
+              </a:lnSpc>
+              <a:buNone/>
+            </a:pPr>
+            <a:r>
+              <a:rPr lang="en-US" sz="1300" dirty="0">
                 <a:solidFill>
                   <a:srgbClr val="152D47"/>
                 </a:solidFill>
@@ -13731,7 +13951,7 @@
               </a:rPr>
               <a:t>Stage 4 — Transformer Decoder (Auto-regressive)</a:t>
             </a:r>
-            <a:endParaRPr lang="en-US" sz="1200" dirty="0"/>
+            <a:endParaRPr lang="en-US" sz="1300" dirty="0"/>
           </a:p>
         </p:txBody>
       </p:sp>
@@ -13743,12 +13963,12 @@
         </p:nvSpPr>
         <p:spPr>
           <a:xfrm>
-            <a:off x="7307580" y="3036094"/>
-            <a:ext cx="15240" cy="3992642"/>
+            <a:off x="841177" y="3401258"/>
+            <a:ext cx="15240" cy="3529608"/>
           </a:xfrm>
           <a:prstGeom prst="roundRect">
             <a:avLst>
-              <a:gd name="adj" fmla="val 121871"/>
+              <a:gd name="adj" fmla="val 134992"/>
             </a:avLst>
           </a:prstGeom>
           <a:solidFill>
@@ -13765,12 +13985,12 @@
         </p:nvSpPr>
         <p:spPr>
           <a:xfrm>
-            <a:off x="7082909" y="3167658"/>
-            <a:ext cx="247531" cy="15240"/>
+            <a:off x="825937" y="3618667"/>
+            <a:ext cx="411361" cy="15240"/>
           </a:xfrm>
           <a:prstGeom prst="roundRect">
             <a:avLst>
-              <a:gd name="adj" fmla="val 121871"/>
+              <a:gd name="adj" fmla="val 134992"/>
             </a:avLst>
           </a:prstGeom>
           <a:solidFill>
@@ -13787,12 +14007,12 @@
         </p:nvSpPr>
         <p:spPr>
           <a:xfrm>
-            <a:off x="7268825" y="3128903"/>
-            <a:ext cx="92750" cy="92750"/>
+            <a:off x="789801" y="3574911"/>
+            <a:ext cx="102751" cy="102751"/>
           </a:xfrm>
           <a:prstGeom prst="roundRect">
             <a:avLst>
-              <a:gd name="adj" fmla="val 492938"/>
+              <a:gd name="adj" fmla="val 444959"/>
             </a:avLst>
           </a:prstGeom>
           <a:solidFill>
@@ -13803,33 +14023,55 @@
       </p:sp>
       <p:sp>
         <p:nvSpPr>
-          <p:cNvPr id="14" name="Text 12"/>
-          <p:cNvSpPr/>
-          <p:nvPr/>
-        </p:nvSpPr>
-        <p:spPr>
-          <a:xfrm>
-            <a:off x="666631" y="3076218"/>
-            <a:ext cx="6153388" cy="153114"/>
-          </a:xfrm>
-          <a:prstGeom prst="rect">
-            <a:avLst/>
-          </a:prstGeom>
-          <a:noFill/>
-          <a:ln/>
-        </p:spPr>
-        <p:txBody>
-          <a:bodyPr wrap="none" lIns="0" tIns="0" rIns="0" bIns="0" rtlCol="0" anchor="t"/>
-          <a:lstStyle/>
-          <a:p>
-            <a:pPr algn="r" indent="0" marL="0">
-              <a:lnSpc>
-                <a:spcPts val="1200"/>
-              </a:lnSpc>
-              <a:buNone/>
-            </a:pPr>
-            <a:r>
-              <a:rPr lang="en-US" sz="950" dirty="0">
+          <p:cNvPr id="14" name="Shape 12"/>
+          <p:cNvSpPr/>
+          <p:nvPr/>
+        </p:nvSpPr>
+        <p:spPr>
+          <a:xfrm>
+            <a:off x="1252657" y="3401258"/>
+            <a:ext cx="12639318" cy="450056"/>
+          </a:xfrm>
+          <a:prstGeom prst="roundRect">
+            <a:avLst>
+              <a:gd name="adj" fmla="val 4571"/>
+            </a:avLst>
+          </a:prstGeom>
+          <a:solidFill>
+            <a:srgbClr val="F2EEEE"/>
+          </a:solidFill>
+          <a:ln/>
+        </p:spPr>
+      </p:sp>
+      <p:sp>
+        <p:nvSpPr>
+          <p:cNvPr id="15" name="Text 13"/>
+          <p:cNvSpPr/>
+          <p:nvPr/>
+        </p:nvSpPr>
+        <p:spPr>
+          <a:xfrm>
+            <a:off x="1389698" y="3538299"/>
+            <a:ext cx="12365236" cy="175974"/>
+          </a:xfrm>
+          <a:prstGeom prst="rect">
+            <a:avLst/>
+          </a:prstGeom>
+          <a:noFill/>
+          <a:ln/>
+        </p:spPr>
+        <p:txBody>
+          <a:bodyPr wrap="none" lIns="0" tIns="0" rIns="0" bIns="0" rtlCol="0" anchor="t"/>
+          <a:lstStyle/>
+          <a:p>
+            <a:pPr algn="l" indent="0" marL="0">
+              <a:lnSpc>
+                <a:spcPts val="1350"/>
+              </a:lnSpc>
+              <a:buNone/>
+            </a:pPr>
+            <a:r>
+              <a:rPr lang="en-US" sz="1050" dirty="0">
                 <a:solidFill>
                   <a:srgbClr val="4C4C4D"/>
                 </a:solidFill>
@@ -13839,24 +14081,24 @@
               </a:rPr>
               <a:t>Step 0: Input: [START] → Predict: ស</a:t>
             </a:r>
-            <a:endParaRPr lang="en-US" sz="950" dirty="0"/>
-          </a:p>
-        </p:txBody>
-      </p:sp>
-      <p:sp>
-        <p:nvSpPr>
-          <p:cNvPr id="15" name="Shape 13"/>
-          <p:cNvSpPr/>
-          <p:nvPr/>
-        </p:nvSpPr>
-        <p:spPr>
-          <a:xfrm>
-            <a:off x="7299960" y="3797975"/>
-            <a:ext cx="247531" cy="15240"/>
+            <a:endParaRPr lang="en-US" sz="1050" dirty="0"/>
+          </a:p>
+        </p:txBody>
+      </p:sp>
+      <p:sp>
+        <p:nvSpPr>
+          <p:cNvPr id="16" name="Shape 14"/>
+          <p:cNvSpPr/>
+          <p:nvPr/>
+        </p:nvSpPr>
+        <p:spPr>
+          <a:xfrm>
+            <a:off x="825937" y="4234577"/>
+            <a:ext cx="411361" cy="15240"/>
           </a:xfrm>
           <a:prstGeom prst="roundRect">
             <a:avLst>
-              <a:gd name="adj" fmla="val 121871"/>
+              <a:gd name="adj" fmla="val 134992"/>
             </a:avLst>
           </a:prstGeom>
           <a:solidFill>
@@ -13867,18 +14109,18 @@
       </p:sp>
       <p:sp>
         <p:nvSpPr>
-          <p:cNvPr id="16" name="Shape 14"/>
-          <p:cNvSpPr/>
-          <p:nvPr/>
-        </p:nvSpPr>
-        <p:spPr>
-          <a:xfrm>
-            <a:off x="7268825" y="3759220"/>
-            <a:ext cx="92750" cy="92750"/>
+          <p:cNvPr id="17" name="Shape 15"/>
+          <p:cNvSpPr/>
+          <p:nvPr/>
+        </p:nvSpPr>
+        <p:spPr>
+          <a:xfrm>
+            <a:off x="789801" y="4190821"/>
+            <a:ext cx="102751" cy="102751"/>
           </a:xfrm>
           <a:prstGeom prst="roundRect">
             <a:avLst>
-              <a:gd name="adj" fmla="val 492938"/>
+              <a:gd name="adj" fmla="val 444959"/>
             </a:avLst>
           </a:prstGeom>
           <a:solidFill>
@@ -13889,33 +14131,55 @@
       </p:sp>
       <p:sp>
         <p:nvSpPr>
-          <p:cNvPr id="17" name="Text 15"/>
-          <p:cNvSpPr/>
-          <p:nvPr/>
-        </p:nvSpPr>
-        <p:spPr>
-          <a:xfrm>
-            <a:off x="7810381" y="3706535"/>
-            <a:ext cx="6153388" cy="153114"/>
-          </a:xfrm>
-          <a:prstGeom prst="rect">
-            <a:avLst/>
-          </a:prstGeom>
-          <a:noFill/>
-          <a:ln/>
-        </p:spPr>
-        <p:txBody>
-          <a:bodyPr wrap="none" lIns="0" tIns="0" rIns="0" bIns="0" rtlCol="0" anchor="t"/>
-          <a:lstStyle/>
-          <a:p>
-            <a:pPr algn="l" indent="0" marL="0">
-              <a:lnSpc>
-                <a:spcPts val="1200"/>
-              </a:lnSpc>
-              <a:buNone/>
-            </a:pPr>
-            <a:r>
-              <a:rPr lang="en-US" sz="950" dirty="0">
+          <p:cNvPr id="18" name="Shape 16"/>
+          <p:cNvSpPr/>
+          <p:nvPr/>
+        </p:nvSpPr>
+        <p:spPr>
+          <a:xfrm>
+            <a:off x="1252657" y="4017169"/>
+            <a:ext cx="12639318" cy="450056"/>
+          </a:xfrm>
+          <a:prstGeom prst="roundRect">
+            <a:avLst>
+              <a:gd name="adj" fmla="val 4571"/>
+            </a:avLst>
+          </a:prstGeom>
+          <a:solidFill>
+            <a:srgbClr val="F2EEEE"/>
+          </a:solidFill>
+          <a:ln/>
+        </p:spPr>
+      </p:sp>
+      <p:sp>
+        <p:nvSpPr>
+          <p:cNvPr id="19" name="Text 17"/>
+          <p:cNvSpPr/>
+          <p:nvPr/>
+        </p:nvSpPr>
+        <p:spPr>
+          <a:xfrm>
+            <a:off x="1389698" y="4154210"/>
+            <a:ext cx="12365236" cy="175974"/>
+          </a:xfrm>
+          <a:prstGeom prst="rect">
+            <a:avLst/>
+          </a:prstGeom>
+          <a:noFill/>
+          <a:ln/>
+        </p:spPr>
+        <p:txBody>
+          <a:bodyPr wrap="none" lIns="0" tIns="0" rIns="0" bIns="0" rtlCol="0" anchor="t"/>
+          <a:lstStyle/>
+          <a:p>
+            <a:pPr algn="l" indent="0" marL="0">
+              <a:lnSpc>
+                <a:spcPts val="1350"/>
+              </a:lnSpc>
+              <a:buNone/>
+            </a:pPr>
+            <a:r>
+              <a:rPr lang="en-US" sz="1050" dirty="0">
                 <a:solidFill>
                   <a:srgbClr val="4C4C4D"/>
                 </a:solidFill>
@@ -13925,24 +14189,24 @@
               </a:rPr>
               <a:t>Step 1: Input: [START, ស] → Predict: ្ (coeng)</a:t>
             </a:r>
-            <a:endParaRPr lang="en-US" sz="950" dirty="0"/>
-          </a:p>
-        </p:txBody>
-      </p:sp>
-      <p:sp>
-        <p:nvSpPr>
-          <p:cNvPr id="18" name="Shape 16"/>
-          <p:cNvSpPr/>
-          <p:nvPr/>
-        </p:nvSpPr>
-        <p:spPr>
-          <a:xfrm>
-            <a:off x="7082909" y="4380786"/>
-            <a:ext cx="247531" cy="15240"/>
+            <a:endParaRPr lang="en-US" sz="1050" dirty="0"/>
+          </a:p>
+        </p:txBody>
+      </p:sp>
+      <p:sp>
+        <p:nvSpPr>
+          <p:cNvPr id="20" name="Shape 18"/>
+          <p:cNvSpPr/>
+          <p:nvPr/>
+        </p:nvSpPr>
+        <p:spPr>
+          <a:xfrm>
+            <a:off x="825937" y="4850487"/>
+            <a:ext cx="411361" cy="15240"/>
           </a:xfrm>
           <a:prstGeom prst="roundRect">
             <a:avLst>
-              <a:gd name="adj" fmla="val 121871"/>
+              <a:gd name="adj" fmla="val 134992"/>
             </a:avLst>
           </a:prstGeom>
           <a:solidFill>
@@ -13953,18 +14217,18 @@
       </p:sp>
       <p:sp>
         <p:nvSpPr>
-          <p:cNvPr id="19" name="Shape 17"/>
-          <p:cNvSpPr/>
-          <p:nvPr/>
-        </p:nvSpPr>
-        <p:spPr>
-          <a:xfrm>
-            <a:off x="7268825" y="4342031"/>
-            <a:ext cx="92750" cy="92750"/>
+          <p:cNvPr id="21" name="Shape 19"/>
+          <p:cNvSpPr/>
+          <p:nvPr/>
+        </p:nvSpPr>
+        <p:spPr>
+          <a:xfrm>
+            <a:off x="789801" y="4806732"/>
+            <a:ext cx="102751" cy="102751"/>
           </a:xfrm>
           <a:prstGeom prst="roundRect">
             <a:avLst>
-              <a:gd name="adj" fmla="val 492938"/>
+              <a:gd name="adj" fmla="val 444959"/>
             </a:avLst>
           </a:prstGeom>
           <a:solidFill>
@@ -13975,33 +14239,55 @@
       </p:sp>
       <p:sp>
         <p:nvSpPr>
-          <p:cNvPr id="20" name="Text 18"/>
-          <p:cNvSpPr/>
-          <p:nvPr/>
-        </p:nvSpPr>
-        <p:spPr>
-          <a:xfrm>
-            <a:off x="666631" y="4289346"/>
-            <a:ext cx="6153388" cy="153114"/>
-          </a:xfrm>
-          <a:prstGeom prst="rect">
-            <a:avLst/>
-          </a:prstGeom>
-          <a:noFill/>
-          <a:ln/>
-        </p:spPr>
-        <p:txBody>
-          <a:bodyPr wrap="none" lIns="0" tIns="0" rIns="0" bIns="0" rtlCol="0" anchor="t"/>
-          <a:lstStyle/>
-          <a:p>
-            <a:pPr algn="r" indent="0" marL="0">
-              <a:lnSpc>
-                <a:spcPts val="1200"/>
-              </a:lnSpc>
-              <a:buNone/>
-            </a:pPr>
-            <a:r>
-              <a:rPr lang="en-US" sz="950" dirty="0">
+          <p:cNvPr id="22" name="Shape 20"/>
+          <p:cNvSpPr/>
+          <p:nvPr/>
+        </p:nvSpPr>
+        <p:spPr>
+          <a:xfrm>
+            <a:off x="1252657" y="4633079"/>
+            <a:ext cx="12639318" cy="450056"/>
+          </a:xfrm>
+          <a:prstGeom prst="roundRect">
+            <a:avLst>
+              <a:gd name="adj" fmla="val 4571"/>
+            </a:avLst>
+          </a:prstGeom>
+          <a:solidFill>
+            <a:srgbClr val="F2EEEE"/>
+          </a:solidFill>
+          <a:ln/>
+        </p:spPr>
+      </p:sp>
+      <p:sp>
+        <p:nvSpPr>
+          <p:cNvPr id="23" name="Text 21"/>
+          <p:cNvSpPr/>
+          <p:nvPr/>
+        </p:nvSpPr>
+        <p:spPr>
+          <a:xfrm>
+            <a:off x="1389698" y="4770120"/>
+            <a:ext cx="12365236" cy="175974"/>
+          </a:xfrm>
+          <a:prstGeom prst="rect">
+            <a:avLst/>
+          </a:prstGeom>
+          <a:noFill/>
+          <a:ln/>
+        </p:spPr>
+        <p:txBody>
+          <a:bodyPr wrap="none" lIns="0" tIns="0" rIns="0" bIns="0" rtlCol="0" anchor="t"/>
+          <a:lstStyle/>
+          <a:p>
+            <a:pPr algn="l" indent="0" marL="0">
+              <a:lnSpc>
+                <a:spcPts val="1350"/>
+              </a:lnSpc>
+              <a:buNone/>
+            </a:pPr>
+            <a:r>
+              <a:rPr lang="en-US" sz="1050" dirty="0">
                 <a:solidFill>
                   <a:srgbClr val="4C4C4D"/>
                 </a:solidFill>
@@ -14011,24 +14297,24 @@
               </a:rPr>
               <a:t>Step 2: Input: [START, ស, ្] → Predict: ត</a:t>
             </a:r>
-            <a:endParaRPr lang="en-US" sz="950" dirty="0"/>
-          </a:p>
-        </p:txBody>
-      </p:sp>
-      <p:sp>
-        <p:nvSpPr>
-          <p:cNvPr id="21" name="Shape 19"/>
-          <p:cNvSpPr/>
-          <p:nvPr/>
-        </p:nvSpPr>
-        <p:spPr>
-          <a:xfrm>
-            <a:off x="7299960" y="4963716"/>
-            <a:ext cx="247531" cy="15240"/>
+            <a:endParaRPr lang="en-US" sz="1050" dirty="0"/>
+          </a:p>
+        </p:txBody>
+      </p:sp>
+      <p:sp>
+        <p:nvSpPr>
+          <p:cNvPr id="24" name="Shape 22"/>
+          <p:cNvSpPr/>
+          <p:nvPr/>
+        </p:nvSpPr>
+        <p:spPr>
+          <a:xfrm>
+            <a:off x="825937" y="5466398"/>
+            <a:ext cx="411361" cy="15240"/>
           </a:xfrm>
           <a:prstGeom prst="roundRect">
             <a:avLst>
-              <a:gd name="adj" fmla="val 121871"/>
+              <a:gd name="adj" fmla="val 134992"/>
             </a:avLst>
           </a:prstGeom>
           <a:solidFill>
@@ -14039,18 +14325,18 @@
       </p:sp>
       <p:sp>
         <p:nvSpPr>
-          <p:cNvPr id="22" name="Shape 20"/>
-          <p:cNvSpPr/>
-          <p:nvPr/>
-        </p:nvSpPr>
-        <p:spPr>
-          <a:xfrm>
-            <a:off x="7268825" y="4924961"/>
-            <a:ext cx="92750" cy="92750"/>
+          <p:cNvPr id="25" name="Shape 23"/>
+          <p:cNvSpPr/>
+          <p:nvPr/>
+        </p:nvSpPr>
+        <p:spPr>
+          <a:xfrm>
+            <a:off x="789801" y="5422642"/>
+            <a:ext cx="102751" cy="102751"/>
           </a:xfrm>
           <a:prstGeom prst="roundRect">
             <a:avLst>
-              <a:gd name="adj" fmla="val 492938"/>
+              <a:gd name="adj" fmla="val 444959"/>
             </a:avLst>
           </a:prstGeom>
           <a:solidFill>
@@ -14061,33 +14347,55 @@
       </p:sp>
       <p:sp>
         <p:nvSpPr>
-          <p:cNvPr id="23" name="Text 21"/>
-          <p:cNvSpPr/>
-          <p:nvPr/>
-        </p:nvSpPr>
-        <p:spPr>
-          <a:xfrm>
-            <a:off x="7810381" y="4872276"/>
-            <a:ext cx="6153388" cy="153114"/>
-          </a:xfrm>
-          <a:prstGeom prst="rect">
-            <a:avLst/>
-          </a:prstGeom>
-          <a:noFill/>
-          <a:ln/>
-        </p:spPr>
-        <p:txBody>
-          <a:bodyPr wrap="none" lIns="0" tIns="0" rIns="0" bIns="0" rtlCol="0" anchor="t"/>
-          <a:lstStyle/>
-          <a:p>
-            <a:pPr algn="l" indent="0" marL="0">
-              <a:lnSpc>
-                <a:spcPts val="1200"/>
-              </a:lnSpc>
-              <a:buNone/>
-            </a:pPr>
-            <a:r>
-              <a:rPr lang="en-US" sz="950" dirty="0">
+          <p:cNvPr id="26" name="Shape 24"/>
+          <p:cNvSpPr/>
+          <p:nvPr/>
+        </p:nvSpPr>
+        <p:spPr>
+          <a:xfrm>
+            <a:off x="1252657" y="5248989"/>
+            <a:ext cx="12639318" cy="450056"/>
+          </a:xfrm>
+          <a:prstGeom prst="roundRect">
+            <a:avLst>
+              <a:gd name="adj" fmla="val 4571"/>
+            </a:avLst>
+          </a:prstGeom>
+          <a:solidFill>
+            <a:srgbClr val="F2EEEE"/>
+          </a:solidFill>
+          <a:ln/>
+        </p:spPr>
+      </p:sp>
+      <p:sp>
+        <p:nvSpPr>
+          <p:cNvPr id="27" name="Text 25"/>
+          <p:cNvSpPr/>
+          <p:nvPr/>
+        </p:nvSpPr>
+        <p:spPr>
+          <a:xfrm>
+            <a:off x="1389698" y="5386030"/>
+            <a:ext cx="12365236" cy="175974"/>
+          </a:xfrm>
+          <a:prstGeom prst="rect">
+            <a:avLst/>
+          </a:prstGeom>
+          <a:noFill/>
+          <a:ln/>
+        </p:spPr>
+        <p:txBody>
+          <a:bodyPr wrap="none" lIns="0" tIns="0" rIns="0" bIns="0" rtlCol="0" anchor="t"/>
+          <a:lstStyle/>
+          <a:p>
+            <a:pPr algn="l" indent="0" marL="0">
+              <a:lnSpc>
+                <a:spcPts val="1350"/>
+              </a:lnSpc>
+              <a:buNone/>
+            </a:pPr>
+            <a:r>
+              <a:rPr lang="en-US" sz="1050" dirty="0">
                 <a:solidFill>
                   <a:srgbClr val="4C4C4D"/>
                 </a:solidFill>
@@ -14097,24 +14405,24 @@
               </a:rPr>
               <a:t>Step 3: Input: [START, ស, ្, ត, ្] → Predict: រ</a:t>
             </a:r>
-            <a:endParaRPr lang="en-US" sz="950" dirty="0"/>
-          </a:p>
-        </p:txBody>
-      </p:sp>
-      <p:sp>
-        <p:nvSpPr>
-          <p:cNvPr id="24" name="Shape 22"/>
-          <p:cNvSpPr/>
-          <p:nvPr/>
-        </p:nvSpPr>
-        <p:spPr>
-          <a:xfrm>
-            <a:off x="7082909" y="5546646"/>
-            <a:ext cx="247531" cy="15240"/>
+            <a:endParaRPr lang="en-US" sz="1050" dirty="0"/>
+          </a:p>
+        </p:txBody>
+      </p:sp>
+      <p:sp>
+        <p:nvSpPr>
+          <p:cNvPr id="28" name="Shape 26"/>
+          <p:cNvSpPr/>
+          <p:nvPr/>
+        </p:nvSpPr>
+        <p:spPr>
+          <a:xfrm>
+            <a:off x="825937" y="6082308"/>
+            <a:ext cx="411361" cy="15240"/>
           </a:xfrm>
           <a:prstGeom prst="roundRect">
             <a:avLst>
-              <a:gd name="adj" fmla="val 121871"/>
+              <a:gd name="adj" fmla="val 134992"/>
             </a:avLst>
           </a:prstGeom>
           <a:solidFill>
@@ -14125,18 +14433,18 @@
       </p:sp>
       <p:sp>
         <p:nvSpPr>
-          <p:cNvPr id="25" name="Shape 23"/>
-          <p:cNvSpPr/>
-          <p:nvPr/>
-        </p:nvSpPr>
-        <p:spPr>
-          <a:xfrm>
-            <a:off x="7268825" y="5507891"/>
-            <a:ext cx="92750" cy="92750"/>
+          <p:cNvPr id="29" name="Shape 27"/>
+          <p:cNvSpPr/>
+          <p:nvPr/>
+        </p:nvSpPr>
+        <p:spPr>
+          <a:xfrm>
+            <a:off x="789801" y="6038552"/>
+            <a:ext cx="102751" cy="102751"/>
           </a:xfrm>
           <a:prstGeom prst="roundRect">
             <a:avLst>
-              <a:gd name="adj" fmla="val 492938"/>
+              <a:gd name="adj" fmla="val 444959"/>
             </a:avLst>
           </a:prstGeom>
           <a:solidFill>
@@ -14147,33 +14455,55 @@
       </p:sp>
       <p:sp>
         <p:nvSpPr>
-          <p:cNvPr id="26" name="Text 24"/>
-          <p:cNvSpPr/>
-          <p:nvPr/>
-        </p:nvSpPr>
-        <p:spPr>
-          <a:xfrm>
-            <a:off x="666631" y="5455206"/>
-            <a:ext cx="6153388" cy="153114"/>
-          </a:xfrm>
-          <a:prstGeom prst="rect">
-            <a:avLst/>
-          </a:prstGeom>
-          <a:noFill/>
-          <a:ln/>
-        </p:spPr>
-        <p:txBody>
-          <a:bodyPr wrap="none" lIns="0" tIns="0" rIns="0" bIns="0" rtlCol="0" anchor="t"/>
-          <a:lstStyle/>
-          <a:p>
-            <a:pPr algn="r" indent="0" marL="0">
-              <a:lnSpc>
-                <a:spcPts val="1200"/>
-              </a:lnSpc>
-              <a:buNone/>
-            </a:pPr>
-            <a:r>
-              <a:rPr lang="en-US" sz="950" dirty="0">
+          <p:cNvPr id="30" name="Shape 28"/>
+          <p:cNvSpPr/>
+          <p:nvPr/>
+        </p:nvSpPr>
+        <p:spPr>
+          <a:xfrm>
+            <a:off x="1252657" y="5864900"/>
+            <a:ext cx="12639318" cy="450056"/>
+          </a:xfrm>
+          <a:prstGeom prst="roundRect">
+            <a:avLst>
+              <a:gd name="adj" fmla="val 4571"/>
+            </a:avLst>
+          </a:prstGeom>
+          <a:solidFill>
+            <a:srgbClr val="F2EEEE"/>
+          </a:solidFill>
+          <a:ln/>
+        </p:spPr>
+      </p:sp>
+      <p:sp>
+        <p:nvSpPr>
+          <p:cNvPr id="31" name="Text 29"/>
+          <p:cNvSpPr/>
+          <p:nvPr/>
+        </p:nvSpPr>
+        <p:spPr>
+          <a:xfrm>
+            <a:off x="1389698" y="6001941"/>
+            <a:ext cx="12365236" cy="175974"/>
+          </a:xfrm>
+          <a:prstGeom prst="rect">
+            <a:avLst/>
+          </a:prstGeom>
+          <a:noFill/>
+          <a:ln/>
+        </p:spPr>
+        <p:txBody>
+          <a:bodyPr wrap="none" lIns="0" tIns="0" rIns="0" bIns="0" rtlCol="0" anchor="t"/>
+          <a:lstStyle/>
+          <a:p>
+            <a:pPr algn="l" indent="0" marL="0">
+              <a:lnSpc>
+                <a:spcPts val="1350"/>
+              </a:lnSpc>
+              <a:buNone/>
+            </a:pPr>
+            <a:r>
+              <a:rPr lang="en-US" sz="1050" dirty="0">
                 <a:solidFill>
                   <a:srgbClr val="4C4C4D"/>
                 </a:solidFill>
@@ -14183,24 +14513,24 @@
               </a:rPr>
               <a:t>Step 4: Input: [START, ស, ្, ត, ្, រ] → Predict: ី</a:t>
             </a:r>
-            <a:endParaRPr lang="en-US" sz="950" dirty="0"/>
-          </a:p>
-        </p:txBody>
-      </p:sp>
-      <p:sp>
-        <p:nvSpPr>
-          <p:cNvPr id="27" name="Shape 25"/>
-          <p:cNvSpPr/>
-          <p:nvPr/>
-        </p:nvSpPr>
-        <p:spPr>
-          <a:xfrm>
-            <a:off x="7299960" y="6129576"/>
-            <a:ext cx="247531" cy="15240"/>
+            <a:endParaRPr lang="en-US" sz="1050" dirty="0"/>
+          </a:p>
+        </p:txBody>
+      </p:sp>
+      <p:sp>
+        <p:nvSpPr>
+          <p:cNvPr id="32" name="Shape 30"/>
+          <p:cNvSpPr/>
+          <p:nvPr/>
+        </p:nvSpPr>
+        <p:spPr>
+          <a:xfrm>
+            <a:off x="825937" y="6698218"/>
+            <a:ext cx="411361" cy="15240"/>
           </a:xfrm>
           <a:prstGeom prst="roundRect">
             <a:avLst>
-              <a:gd name="adj" fmla="val 121871"/>
+              <a:gd name="adj" fmla="val 134992"/>
             </a:avLst>
           </a:prstGeom>
           <a:solidFill>
@@ -14211,18 +14541,18 @@
       </p:sp>
       <p:sp>
         <p:nvSpPr>
-          <p:cNvPr id="28" name="Shape 26"/>
-          <p:cNvSpPr/>
-          <p:nvPr/>
-        </p:nvSpPr>
-        <p:spPr>
-          <a:xfrm>
-            <a:off x="7268825" y="6090821"/>
-            <a:ext cx="92750" cy="92750"/>
+          <p:cNvPr id="33" name="Shape 31"/>
+          <p:cNvSpPr/>
+          <p:nvPr/>
+        </p:nvSpPr>
+        <p:spPr>
+          <a:xfrm>
+            <a:off x="789801" y="6654463"/>
+            <a:ext cx="102751" cy="102751"/>
           </a:xfrm>
           <a:prstGeom prst="roundRect">
             <a:avLst>
-              <a:gd name="adj" fmla="val 492938"/>
+              <a:gd name="adj" fmla="val 444959"/>
             </a:avLst>
           </a:prstGeom>
           <a:solidFill>
@@ -14233,33 +14563,55 @@
       </p:sp>
       <p:sp>
         <p:nvSpPr>
-          <p:cNvPr id="29" name="Text 27"/>
-          <p:cNvSpPr/>
-          <p:nvPr/>
-        </p:nvSpPr>
-        <p:spPr>
-          <a:xfrm>
-            <a:off x="7810381" y="6038136"/>
-            <a:ext cx="6153388" cy="153114"/>
-          </a:xfrm>
-          <a:prstGeom prst="rect">
-            <a:avLst/>
-          </a:prstGeom>
-          <a:noFill/>
-          <a:ln/>
-        </p:spPr>
-        <p:txBody>
-          <a:bodyPr wrap="none" lIns="0" tIns="0" rIns="0" bIns="0" rtlCol="0" anchor="t"/>
-          <a:lstStyle/>
-          <a:p>
-            <a:pPr algn="l" indent="0" marL="0">
-              <a:lnSpc>
-                <a:spcPts val="1200"/>
-              </a:lnSpc>
-              <a:buNone/>
-            </a:pPr>
-            <a:r>
-              <a:rPr lang="en-US" sz="950" dirty="0">
+          <p:cNvPr id="34" name="Shape 32"/>
+          <p:cNvSpPr/>
+          <p:nvPr/>
+        </p:nvSpPr>
+        <p:spPr>
+          <a:xfrm>
+            <a:off x="1252657" y="6480810"/>
+            <a:ext cx="12639318" cy="450056"/>
+          </a:xfrm>
+          <a:prstGeom prst="roundRect">
+            <a:avLst>
+              <a:gd name="adj" fmla="val 4571"/>
+            </a:avLst>
+          </a:prstGeom>
+          <a:solidFill>
+            <a:srgbClr val="F2EEEE"/>
+          </a:solidFill>
+          <a:ln/>
+        </p:spPr>
+      </p:sp>
+      <p:sp>
+        <p:nvSpPr>
+          <p:cNvPr id="35" name="Text 33"/>
+          <p:cNvSpPr/>
+          <p:nvPr/>
+        </p:nvSpPr>
+        <p:spPr>
+          <a:xfrm>
+            <a:off x="1389698" y="6617851"/>
+            <a:ext cx="12365236" cy="175974"/>
+          </a:xfrm>
+          <a:prstGeom prst="rect">
+            <a:avLst/>
+          </a:prstGeom>
+          <a:noFill/>
+          <a:ln/>
+        </p:spPr>
+        <p:txBody>
+          <a:bodyPr wrap="none" lIns="0" tIns="0" rIns="0" bIns="0" rtlCol="0" anchor="t"/>
+          <a:lstStyle/>
+          <a:p>
+            <a:pPr algn="l" indent="0" marL="0">
+              <a:lnSpc>
+                <a:spcPts val="1350"/>
+              </a:lnSpc>
+              <a:buNone/>
+            </a:pPr>
+            <a:r>
+              <a:rPr lang="en-US" sz="1050" dirty="0">
                 <a:solidFill>
                   <a:srgbClr val="4C4C4D"/>
                 </a:solidFill>
@@ -14269,24 +14621,24 @@
               </a:rPr>
               <a:t>Step 5: Input: [START, ស, ្, ត, ្, រ, ី] → Predict: [END] → Final: ស្ត្រី ✓</a:t>
             </a:r>
-            <a:endParaRPr lang="en-US" sz="950" dirty="0"/>
-          </a:p>
-        </p:txBody>
-      </p:sp>
-      <p:sp>
-        <p:nvSpPr>
-          <p:cNvPr id="30" name="Shape 28"/>
-          <p:cNvSpPr/>
-          <p:nvPr/>
-        </p:nvSpPr>
-        <p:spPr>
-          <a:xfrm>
-            <a:off x="666631" y="7104698"/>
-            <a:ext cx="13297138" cy="373975"/>
+            <a:endParaRPr lang="en-US" sz="1050" dirty="0"/>
+          </a:p>
+        </p:txBody>
+      </p:sp>
+      <p:sp>
+        <p:nvSpPr>
+          <p:cNvPr id="36" name="Shape 34"/>
+          <p:cNvSpPr/>
+          <p:nvPr/>
+        </p:nvSpPr>
+        <p:spPr>
+          <a:xfrm>
+            <a:off x="738426" y="7024092"/>
+            <a:ext cx="13153549" cy="436007"/>
           </a:xfrm>
           <a:prstGeom prst="roundRect">
             <a:avLst>
-              <a:gd name="adj" fmla="val 4966"/>
+              <a:gd name="adj" fmla="val 4718"/>
             </a:avLst>
           </a:prstGeom>
           <a:solidFill>
@@ -14297,7 +14649,7 @@
       </p:sp>
       <p:pic>
         <p:nvPicPr>
-          <p:cNvPr id="31" name="Image 0" descr="preencoded.png">    </p:cNvPr>
+          <p:cNvPr id="37" name="Image 0" descr="preencoded.png">    </p:cNvPr>
           <p:cNvPicPr>
             <a:picLocks noChangeAspect="1"/>
           </p:cNvPicPr>
@@ -14311,8 +14663,8 @@
         </p:blipFill>
         <p:spPr>
           <a:xfrm>
-            <a:off x="790337" y="7265194"/>
-            <a:ext cx="154662" cy="123706"/>
+            <a:off x="875467" y="7204829"/>
+            <a:ext cx="171331" cy="137041"/>
           </a:xfrm>
           <a:prstGeom prst="rect">
             <a:avLst/>
@@ -14321,33 +14673,33 @@
       </p:pic>
       <p:sp>
         <p:nvSpPr>
-          <p:cNvPr id="32" name="Text 29"/>
-          <p:cNvSpPr/>
-          <p:nvPr/>
-        </p:nvSpPr>
-        <p:spPr>
-          <a:xfrm>
-            <a:off x="1068705" y="7203043"/>
-            <a:ext cx="12771358" cy="153114"/>
-          </a:xfrm>
-          <a:prstGeom prst="rect">
-            <a:avLst/>
-          </a:prstGeom>
-          <a:noFill/>
-          <a:ln/>
-        </p:spPr>
-        <p:txBody>
-          <a:bodyPr wrap="none" lIns="0" tIns="0" rIns="0" bIns="0" rtlCol="0" anchor="t"/>
-          <a:lstStyle/>
-          <a:p>
-            <a:pPr algn="l" indent="0" marL="0">
-              <a:lnSpc>
-                <a:spcPts val="1200"/>
-              </a:lnSpc>
-              <a:buNone/>
-            </a:pPr>
-            <a:r>
-              <a:rPr lang="en-US" sz="950" dirty="0">
+          <p:cNvPr id="38" name="Text 35"/>
+          <p:cNvSpPr/>
+          <p:nvPr/>
+        </p:nvSpPr>
+        <p:spPr>
+          <a:xfrm>
+            <a:off x="1183838" y="7141131"/>
+            <a:ext cx="12571095" cy="175974"/>
+          </a:xfrm>
+          <a:prstGeom prst="rect">
+            <a:avLst/>
+          </a:prstGeom>
+          <a:noFill/>
+          <a:ln/>
+        </p:spPr>
+        <p:txBody>
+          <a:bodyPr wrap="none" lIns="0" tIns="0" rIns="0" bIns="0" rtlCol="0" anchor="t"/>
+          <a:lstStyle/>
+          <a:p>
+            <a:pPr algn="l" indent="0" marL="0">
+              <a:lnSpc>
+                <a:spcPts val="1350"/>
+              </a:lnSpc>
+              <a:buNone/>
+            </a:pPr>
+            <a:r>
+              <a:rPr lang="en-US" sz="1050" dirty="0">
                 <a:solidFill>
                   <a:srgbClr val="000000"/>
                 </a:solidFill>
@@ -14357,7 +14709,7 @@
               </a:rPr>
               <a:t>Vocabulary: ~120 tokens (114 Khmer Unicode codepoints + [PAD] [UNK] [START] [END]). Stage 5 — Final Output: Khmer Unicode Text — can now be stored, searched, translated, or spoken aloud.</a:t>
             </a:r>
-            <a:endParaRPr lang="en-US" sz="950" dirty="0"/>
+            <a:endParaRPr lang="en-US" sz="1050" dirty="0"/>
           </a:p>
         </p:txBody>
       </p:sp>
